--- a/local-agentic-stack-talk.pptx
+++ b/local-agentic-stack-talk.pptx
@@ -5,18 +5,19 @@
     <p:sldMasterId id="2147483648" r:id="rId1"/>
   </p:sldMasterIdLst>
   <p:notesMasterIdLst>
-    <p:notesMasterId r:id="rId11"/>
+    <p:notesMasterId r:id="rId12"/>
   </p:notesMasterIdLst>
   <p:sldIdLst>
-    <p:sldId id="256" r:id="rId2"/>
-    <p:sldId id="257" r:id="rId3"/>
-    <p:sldId id="258" r:id="rId4"/>
-    <p:sldId id="259" r:id="rId5"/>
-    <p:sldId id="260" r:id="rId6"/>
-    <p:sldId id="261" r:id="rId7"/>
-    <p:sldId id="262" r:id="rId8"/>
-    <p:sldId id="263" r:id="rId9"/>
-    <p:sldId id="264" r:id="rId10"/>
+    <p:sldId id="265" r:id="rId2"/>
+    <p:sldId id="256" r:id="rId3"/>
+    <p:sldId id="257" r:id="rId4"/>
+    <p:sldId id="258" r:id="rId5"/>
+    <p:sldId id="259" r:id="rId6"/>
+    <p:sldId id="260" r:id="rId7"/>
+    <p:sldId id="261" r:id="rId8"/>
+    <p:sldId id="262" r:id="rId9"/>
+    <p:sldId id="263" r:id="rId10"/>
+    <p:sldId id="264" r:id="rId11"/>
   </p:sldIdLst>
   <p:sldSz cx="12192000" cy="6858000"/>
   <p:notesSz cx="6858000" cy="12192000"/>
@@ -313,7 +314,7 @@
           <a:p>
             <a:fld id="{F7021451-1387-4CA6-816F-3879F97B5CBC}" type="slidenum">
               <a:rPr lang="en-US"/>
-              <a:t>1</a:t>
+              <a:t>2</a:t>
             </a:fld>
             <a:endParaRPr lang="en-US"/>
           </a:p>
@@ -400,7 +401,7 @@
           <a:p>
             <a:fld id="{F7021451-1387-4CA6-816F-3879F97B5CBC}" type="slidenum">
               <a:rPr lang="en-US"/>
-              <a:t>2</a:t>
+              <a:t>3</a:t>
             </a:fld>
             <a:endParaRPr lang="en-US"/>
           </a:p>
@@ -487,7 +488,7 @@
           <a:p>
             <a:fld id="{F7021451-1387-4CA6-816F-3879F97B5CBC}" type="slidenum">
               <a:rPr lang="en-US"/>
-              <a:t>3</a:t>
+              <a:t>4</a:t>
             </a:fld>
             <a:endParaRPr lang="en-US"/>
           </a:p>
@@ -574,7 +575,7 @@
           <a:p>
             <a:fld id="{F7021451-1387-4CA6-816F-3879F97B5CBC}" type="slidenum">
               <a:rPr lang="en-US"/>
-              <a:t>4</a:t>
+              <a:t>5</a:t>
             </a:fld>
             <a:endParaRPr lang="en-US"/>
           </a:p>
@@ -661,7 +662,7 @@
           <a:p>
             <a:fld id="{F7021451-1387-4CA6-816F-3879F97B5CBC}" type="slidenum">
               <a:rPr lang="en-US"/>
-              <a:t>5</a:t>
+              <a:t>6</a:t>
             </a:fld>
             <a:endParaRPr lang="en-US"/>
           </a:p>
@@ -748,7 +749,7 @@
           <a:p>
             <a:fld id="{F7021451-1387-4CA6-816F-3879F97B5CBC}" type="slidenum">
               <a:rPr lang="en-US"/>
-              <a:t>6</a:t>
+              <a:t>7</a:t>
             </a:fld>
             <a:endParaRPr lang="en-US"/>
           </a:p>
@@ -835,7 +836,7 @@
           <a:p>
             <a:fld id="{F7021451-1387-4CA6-816F-3879F97B5CBC}" type="slidenum">
               <a:rPr lang="en-US"/>
-              <a:t>7</a:t>
+              <a:t>8</a:t>
             </a:fld>
             <a:endParaRPr lang="en-US"/>
           </a:p>
@@ -922,7 +923,7 @@
           <a:p>
             <a:fld id="{F7021451-1387-4CA6-816F-3879F97B5CBC}" type="slidenum">
               <a:rPr lang="en-US"/>
-              <a:t>8</a:t>
+              <a:t>9</a:t>
             </a:fld>
             <a:endParaRPr lang="en-US"/>
           </a:p>
@@ -1009,7 +1010,7 @@
           <a:p>
             <a:fld id="{F7021451-1387-4CA6-816F-3879F97B5CBC}" type="slidenum">
               <a:rPr lang="en-US"/>
-              <a:t>9</a:t>
+              <a:t>10</a:t>
             </a:fld>
             <a:endParaRPr lang="en-US"/>
           </a:p>
@@ -1342,6 +1343,1014 @@
 
 <file path=ppt/slides/slide1.xml><?xml version="1.0" encoding="utf-8"?>
 <p:sld xmlns:a="http://schemas.openxmlformats.org/drawingml/2006/main" xmlns:r="http://schemas.openxmlformats.org/officeDocument/2006/relationships" xmlns:p="http://schemas.openxmlformats.org/presentationml/2006/main">
+  <p:cSld>
+    <p:bg>
+      <p:bgPr>
+        <a:solidFill>
+          <a:schemeClr val="bg1"/>
+        </a:solidFill>
+        <a:effectLst/>
+      </p:bgPr>
+    </p:bg>
+    <p:spTree>
+      <p:nvGrpSpPr>
+        <p:cNvPr id="1" name=""/>
+        <p:cNvGrpSpPr/>
+        <p:nvPr/>
+      </p:nvGrpSpPr>
+      <p:grpSpPr>
+        <a:xfrm>
+          <a:off x="0" y="0"/>
+          <a:ext cx="0" cy="0"/>
+          <a:chOff x="0" y="0"/>
+          <a:chExt cx="0" cy="0"/>
+        </a:xfrm>
+      </p:grpSpPr>
+      <p:sp useBgFill="1">
+        <p:nvSpPr>
+          <p:cNvPr id="7" name="Rectangle 6">
+            <a:extLst>
+              <a:ext uri="{FF2B5EF4-FFF2-40B4-BE49-F238E27FC236}">
+                <a16:creationId xmlns:a16="http://schemas.microsoft.com/office/drawing/2014/main" id="{AB8C311F-7253-4AED-9701-7FC0708C41C7}"/>
+              </a:ext>
+              <a:ext uri="{C183D7F6-B498-43B3-948B-1728B52AA6E4}">
+                <adec:decorative xmlns:adec="http://schemas.microsoft.com/office/drawing/2017/decorative" val="1"/>
+              </a:ext>
+            </a:extLst>
+          </p:cNvPr>
+          <p:cNvSpPr>
+            <a:spLocks noGrp="1" noRot="1" noChangeAspect="1" noMove="1" noResize="1" noEditPoints="1" noAdjustHandles="1" noChangeArrowheads="1" noChangeShapeType="1" noTextEdit="1"/>
+          </p:cNvSpPr>
+          <p:nvPr>
+            <p:extLst>
+              <p:ext uri="{386F3935-93C4-4BCD-93E2-E3B085C9AB24}">
+                <p16:designElem xmlns:p16="http://schemas.microsoft.com/office/powerpoint/2015/main" val="1"/>
+              </p:ext>
+            </p:extLst>
+          </p:nvPr>
+        </p:nvSpPr>
+        <p:spPr>
+          <a:xfrm>
+            <a:off x="0" y="0"/>
+            <a:ext cx="12192000" cy="6858000"/>
+          </a:xfrm>
+          <a:prstGeom prst="rect">
+            <a:avLst/>
+          </a:prstGeom>
+          <a:ln w="12700" cap="flat" cmpd="sng" algn="ctr">
+            <a:noFill/>
+            <a:prstDash val="solid"/>
+            <a:miter lim="800000"/>
+          </a:ln>
+          <a:effectLst/>
+          <a:extLst>
+            <a:ext uri="{91240B29-F687-4F45-9708-019B960494DF}">
+              <a14:hiddenLine xmlns:a14="http://schemas.microsoft.com/office/drawing/2010/main" w="12700" cap="flat" cmpd="sng" algn="ctr">
+                <a:solidFill>
+                  <a:schemeClr val="accent1">
+                    <a:shade val="50000"/>
+                  </a:schemeClr>
+                </a:solidFill>
+                <a:prstDash val="solid"/>
+                <a:miter lim="800000"/>
+              </a14:hiddenLine>
+            </a:ext>
+          </a:extLst>
+        </p:spPr>
+        <p:style>
+          <a:lnRef idx="2">
+            <a:schemeClr val="accent1">
+              <a:shade val="50000"/>
+            </a:schemeClr>
+          </a:lnRef>
+          <a:fillRef idx="1">
+            <a:schemeClr val="accent1"/>
+          </a:fillRef>
+          <a:effectRef idx="0">
+            <a:schemeClr val="accent1"/>
+          </a:effectRef>
+          <a:fontRef idx="minor">
+            <a:schemeClr val="lt1"/>
+          </a:fontRef>
+        </p:style>
+        <p:txBody>
+          <a:bodyPr rtlCol="0" anchor="ctr"/>
+          <a:lstStyle/>
+          <a:p>
+            <a:pPr algn="ctr"/>
+            <a:endParaRPr lang="en-US"/>
+          </a:p>
+        </p:txBody>
+      </p:sp>
+      <p:sp>
+        <p:nvSpPr>
+          <p:cNvPr id="9" name="Rectangle 8">
+            <a:extLst>
+              <a:ext uri="{FF2B5EF4-FFF2-40B4-BE49-F238E27FC236}">
+                <a16:creationId xmlns:a16="http://schemas.microsoft.com/office/drawing/2014/main" id="{E2384209-CB15-4CDF-9D31-C44FD9A3F20D}"/>
+              </a:ext>
+              <a:ext uri="{C183D7F6-B498-43B3-948B-1728B52AA6E4}">
+                <adec:decorative xmlns:adec="http://schemas.microsoft.com/office/drawing/2017/decorative" val="1"/>
+              </a:ext>
+            </a:extLst>
+          </p:cNvPr>
+          <p:cNvSpPr>
+            <a:spLocks noGrp="1" noRot="1" noChangeAspect="1" noMove="1" noResize="1" noEditPoints="1" noAdjustHandles="1" noChangeArrowheads="1" noChangeShapeType="1" noTextEdit="1"/>
+          </p:cNvSpPr>
+          <p:nvPr>
+            <p:extLst>
+              <p:ext uri="{386F3935-93C4-4BCD-93E2-E3B085C9AB24}">
+                <p16:designElem xmlns:p16="http://schemas.microsoft.com/office/powerpoint/2015/main" val="1"/>
+              </p:ext>
+            </p:extLst>
+          </p:nvPr>
+        </p:nvSpPr>
+        <p:spPr>
+          <a:xfrm rot="16200000" flipH="1">
+            <a:off x="2666617" y="-2666188"/>
+            <a:ext cx="6858000" cy="12191233"/>
+          </a:xfrm>
+          <a:prstGeom prst="rect">
+            <a:avLst/>
+          </a:prstGeom>
+          <a:gradFill>
+            <a:gsLst>
+              <a:gs pos="8000">
+                <a:schemeClr val="accent1"/>
+              </a:gs>
+              <a:gs pos="100000">
+                <a:schemeClr val="accent1">
+                  <a:lumMod val="50000"/>
+                </a:schemeClr>
+              </a:gs>
+            </a:gsLst>
+            <a:lin ang="12000000" scaled="0"/>
+          </a:gradFill>
+          <a:ln>
+            <a:noFill/>
+          </a:ln>
+        </p:spPr>
+        <p:style>
+          <a:lnRef idx="2">
+            <a:schemeClr val="accent1">
+              <a:shade val="50000"/>
+            </a:schemeClr>
+          </a:lnRef>
+          <a:fillRef idx="1">
+            <a:schemeClr val="accent1"/>
+          </a:fillRef>
+          <a:effectRef idx="0">
+            <a:schemeClr val="accent1"/>
+          </a:effectRef>
+          <a:fontRef idx="minor">
+            <a:schemeClr val="lt1"/>
+          </a:fontRef>
+        </p:style>
+        <p:txBody>
+          <a:bodyPr rtlCol="0" anchor="ctr"/>
+          <a:lstStyle/>
+          <a:p>
+            <a:pPr algn="ctr"/>
+            <a:endParaRPr lang="en-US"/>
+          </a:p>
+        </p:txBody>
+      </p:sp>
+      <p:sp>
+        <p:nvSpPr>
+          <p:cNvPr id="11" name="Rectangle 10">
+            <a:extLst>
+              <a:ext uri="{FF2B5EF4-FFF2-40B4-BE49-F238E27FC236}">
+                <a16:creationId xmlns:a16="http://schemas.microsoft.com/office/drawing/2014/main" id="{2633B3B5-CC90-43F0-8714-D31D1F3F0209}"/>
+              </a:ext>
+              <a:ext uri="{C183D7F6-B498-43B3-948B-1728B52AA6E4}">
+                <adec:decorative xmlns:adec="http://schemas.microsoft.com/office/drawing/2017/decorative" val="1"/>
+              </a:ext>
+            </a:extLst>
+          </p:cNvPr>
+          <p:cNvSpPr>
+            <a:spLocks noGrp="1" noRot="1" noChangeAspect="1" noMove="1" noResize="1" noEditPoints="1" noAdjustHandles="1" noChangeArrowheads="1" noChangeShapeType="1" noTextEdit="1"/>
+          </p:cNvSpPr>
+          <p:nvPr>
+            <p:extLst>
+              <p:ext uri="{386F3935-93C4-4BCD-93E2-E3B085C9AB24}">
+                <p16:designElem xmlns:p16="http://schemas.microsoft.com/office/powerpoint/2015/main" val="1"/>
+              </p:ext>
+            </p:extLst>
+          </p:nvPr>
+        </p:nvSpPr>
+        <p:spPr>
+          <a:xfrm rot="10800000" flipH="1">
+            <a:off x="-2311" y="0"/>
+            <a:ext cx="9070846" cy="6857572"/>
+          </a:xfrm>
+          <a:prstGeom prst="rect">
+            <a:avLst/>
+          </a:prstGeom>
+          <a:gradFill>
+            <a:gsLst>
+              <a:gs pos="8000">
+                <a:srgbClr val="000000">
+                  <a:alpha val="52000"/>
+                </a:srgbClr>
+              </a:gs>
+              <a:gs pos="100000">
+                <a:schemeClr val="accent1"/>
+              </a:gs>
+            </a:gsLst>
+            <a:lin ang="4800000" scaled="0"/>
+          </a:gradFill>
+          <a:ln>
+            <a:noFill/>
+          </a:ln>
+        </p:spPr>
+        <p:style>
+          <a:lnRef idx="2">
+            <a:schemeClr val="accent1">
+              <a:shade val="50000"/>
+            </a:schemeClr>
+          </a:lnRef>
+          <a:fillRef idx="1">
+            <a:schemeClr val="accent1"/>
+          </a:fillRef>
+          <a:effectRef idx="0">
+            <a:schemeClr val="accent1"/>
+          </a:effectRef>
+          <a:fontRef idx="minor">
+            <a:schemeClr val="lt1"/>
+          </a:fontRef>
+        </p:style>
+        <p:txBody>
+          <a:bodyPr rtlCol="0" anchor="ctr"/>
+          <a:lstStyle/>
+          <a:p>
+            <a:pPr algn="ctr"/>
+            <a:endParaRPr lang="en-US"/>
+          </a:p>
+        </p:txBody>
+      </p:sp>
+      <p:sp>
+        <p:nvSpPr>
+          <p:cNvPr id="16" name="Rectangle 15">
+            <a:extLst>
+              <a:ext uri="{FF2B5EF4-FFF2-40B4-BE49-F238E27FC236}">
+                <a16:creationId xmlns:a16="http://schemas.microsoft.com/office/drawing/2014/main" id="{A8D57A06-A426-446D-B02C-A2DC6B62E45E}"/>
+              </a:ext>
+              <a:ext uri="{C183D7F6-B498-43B3-948B-1728B52AA6E4}">
+                <adec:decorative xmlns:adec="http://schemas.microsoft.com/office/drawing/2017/decorative" val="1"/>
+              </a:ext>
+            </a:extLst>
+          </p:cNvPr>
+          <p:cNvSpPr>
+            <a:spLocks noGrp="1" noRot="1" noChangeAspect="1" noMove="1" noResize="1" noEditPoints="1" noAdjustHandles="1" noChangeArrowheads="1" noChangeShapeType="1" noTextEdit="1"/>
+          </p:cNvSpPr>
+          <p:nvPr>
+            <p:extLst>
+              <p:ext uri="{386F3935-93C4-4BCD-93E2-E3B085C9AB24}">
+                <p16:designElem xmlns:p16="http://schemas.microsoft.com/office/powerpoint/2015/main" val="1"/>
+              </p:ext>
+            </p:extLst>
+          </p:nvPr>
+        </p:nvSpPr>
+        <p:spPr>
+          <a:xfrm rot="16200000" flipH="1">
+            <a:off x="3649491" y="-1685840"/>
+            <a:ext cx="4894564" cy="12193546"/>
+          </a:xfrm>
+          <a:prstGeom prst="rect">
+            <a:avLst/>
+          </a:prstGeom>
+          <a:gradFill>
+            <a:gsLst>
+              <a:gs pos="0">
+                <a:schemeClr val="accent5">
+                  <a:lumMod val="60000"/>
+                  <a:lumOff val="40000"/>
+                  <a:alpha val="0"/>
+                </a:schemeClr>
+              </a:gs>
+              <a:gs pos="100000">
+                <a:srgbClr val="000000">
+                  <a:alpha val="46000"/>
+                </a:srgbClr>
+              </a:gs>
+            </a:gsLst>
+            <a:lin ang="1200000" scaled="0"/>
+          </a:gradFill>
+          <a:ln>
+            <a:noFill/>
+          </a:ln>
+        </p:spPr>
+        <p:style>
+          <a:lnRef idx="2">
+            <a:schemeClr val="accent1">
+              <a:shade val="50000"/>
+            </a:schemeClr>
+          </a:lnRef>
+          <a:fillRef idx="1">
+            <a:schemeClr val="accent1"/>
+          </a:fillRef>
+          <a:effectRef idx="0">
+            <a:schemeClr val="accent1"/>
+          </a:effectRef>
+          <a:fontRef idx="minor">
+            <a:schemeClr val="lt1"/>
+          </a:fontRef>
+        </p:style>
+        <p:txBody>
+          <a:bodyPr rtlCol="0" anchor="ctr"/>
+          <a:lstStyle/>
+          <a:p>
+            <a:pPr algn="ctr"/>
+            <a:endParaRPr lang="en-US"/>
+          </a:p>
+        </p:txBody>
+      </p:sp>
+      <p:pic>
+        <p:nvPicPr>
+          <p:cNvPr id="2" name="Picture 1">
+            <a:extLst>
+              <a:ext uri="{FF2B5EF4-FFF2-40B4-BE49-F238E27FC236}">
+                <a16:creationId xmlns:a16="http://schemas.microsoft.com/office/drawing/2014/main" id="{E848F02B-CEEB-5507-6731-45DEF0E85A55}"/>
+              </a:ext>
+            </a:extLst>
+          </p:cNvPr>
+          <p:cNvPicPr>
+            <a:picLocks noChangeAspect="1"/>
+          </p:cNvPicPr>
+          <p:nvPr/>
+        </p:nvPicPr>
+        <p:blipFill>
+          <a:blip r:embed="rId2"/>
+          <a:stretch>
+            <a:fillRect/>
+          </a:stretch>
+        </p:blipFill>
+        <p:spPr>
+          <a:xfrm>
+            <a:off x="1660477" y="457200"/>
+            <a:ext cx="8871046" cy="5943600"/>
+          </a:xfrm>
+          <a:prstGeom prst="rect">
+            <a:avLst/>
+          </a:prstGeom>
+        </p:spPr>
+      </p:pic>
+    </p:spTree>
+    <p:extLst>
+      <p:ext uri="{BB962C8B-B14F-4D97-AF65-F5344CB8AC3E}">
+        <p14:creationId xmlns:p14="http://schemas.microsoft.com/office/powerpoint/2010/main" val="3141127518"/>
+      </p:ext>
+    </p:extLst>
+  </p:cSld>
+  <p:clrMapOvr>
+    <a:masterClrMapping/>
+  </p:clrMapOvr>
+</p:sld>
+</file>
+
+<file path=ppt/slides/slide10.xml><?xml version="1.0" encoding="utf-8"?>
+<p:sld xmlns:a="http://schemas.openxmlformats.org/drawingml/2006/main" xmlns:r="http://schemas.openxmlformats.org/officeDocument/2006/relationships" xmlns:p="http://schemas.openxmlformats.org/presentationml/2006/main">
+  <p:cSld name="Slide 9">
+    <p:bg>
+      <p:bgPr>
+        <a:solidFill>
+          <a:srgbClr val="0F1319"/>
+        </a:solidFill>
+        <a:effectLst/>
+      </p:bgPr>
+    </p:bg>
+    <p:spTree>
+      <p:nvGrpSpPr>
+        <p:cNvPr id="1" name=""/>
+        <p:cNvGrpSpPr/>
+        <p:nvPr/>
+      </p:nvGrpSpPr>
+      <p:grpSpPr>
+        <a:xfrm>
+          <a:off x="0" y="0"/>
+          <a:ext cx="0" cy="0"/>
+          <a:chOff x="0" y="0"/>
+          <a:chExt cx="0" cy="0"/>
+        </a:xfrm>
+      </p:grpSpPr>
+      <p:sp>
+        <p:nvSpPr>
+          <p:cNvPr id="3" name="Text 0"/>
+          <p:cNvSpPr txBox="1"/>
+          <p:nvPr/>
+        </p:nvSpPr>
+        <p:spPr>
+          <a:xfrm>
+            <a:off x="566928" y="822960"/>
+            <a:ext cx="11057839" cy="292608"/>
+          </a:xfrm>
+          <a:prstGeom prst="rect">
+            <a:avLst/>
+          </a:prstGeom>
+          <a:noFill/>
+          <a:ln/>
+        </p:spPr>
+        <p:txBody>
+          <a:bodyPr wrap="square" lIns="0" tIns="0" rIns="0" bIns="0" rtlCol="0" anchor="t"/>
+          <a:lstStyle/>
+          <a:p>
+            <a:pPr marL="0" indent="0">
+              <a:buNone/>
+            </a:pPr>
+            <a:r>
+              <a:rPr lang="en-US" sz="1100" b="1" kern="0" spc="300" dirty="0">
+                <a:solidFill>
+                  <a:srgbClr val="4ADE80"/>
+                </a:solidFill>
+                <a:latin typeface="Arial" pitchFamily="34" charset="0"/>
+                <a:ea typeface="Arial" pitchFamily="34" charset="-122"/>
+                <a:cs typeface="Arial" pitchFamily="34" charset="-120"/>
+              </a:rPr>
+              <a:t>EVERY FILE I JUST USED</a:t>
+            </a:r>
+            <a:endParaRPr lang="en-US" sz="1100" dirty="0"/>
+          </a:p>
+        </p:txBody>
+      </p:sp>
+      <p:sp>
+        <p:nvSpPr>
+          <p:cNvPr id="4" name="Text 1"/>
+          <p:cNvSpPr txBox="1"/>
+          <p:nvPr/>
+        </p:nvSpPr>
+        <p:spPr>
+          <a:xfrm>
+            <a:off x="566928" y="1188720"/>
+            <a:ext cx="11057839" cy="1645920"/>
+          </a:xfrm>
+          <a:prstGeom prst="rect">
+            <a:avLst/>
+          </a:prstGeom>
+          <a:noFill/>
+          <a:ln/>
+        </p:spPr>
+        <p:txBody>
+          <a:bodyPr wrap="square" lIns="0" tIns="0" rIns="0" bIns="0" rtlCol="0" anchor="t"/>
+          <a:lstStyle/>
+          <a:p>
+            <a:pPr marL="0" indent="0">
+              <a:lnSpc>
+                <a:spcPct val="115000"/>
+              </a:lnSpc>
+              <a:buNone/>
+            </a:pPr>
+            <a:r>
+              <a:rPr lang="en-US" sz="2400" b="1" dirty="0">
+                <a:solidFill>
+                  <a:srgbClr val="4ADE80"/>
+                </a:solidFill>
+                <a:latin typeface="Arial" pitchFamily="34" charset="0"/>
+                <a:ea typeface="Arial" pitchFamily="34" charset="-122"/>
+                <a:cs typeface="Arial" pitchFamily="34" charset="-120"/>
+              </a:rPr>
+              <a:t>Brain</a:t>
+            </a:r>
+            <a:r>
+              <a:rPr lang="en-US" sz="2400" b="1" dirty="0">
+                <a:solidFill>
+                  <a:srgbClr val="E2E8F0"/>
+                </a:solidFill>
+                <a:latin typeface="Arial" pitchFamily="34" charset="0"/>
+                <a:ea typeface="Arial" pitchFamily="34" charset="-122"/>
+                <a:cs typeface="Arial" pitchFamily="34" charset="-120"/>
+              </a:rPr>
+              <a:t> on the 5090.  </a:t>
+            </a:r>
+            <a:r>
+              <a:rPr lang="en-US" sz="2400" b="1" dirty="0">
+                <a:solidFill>
+                  <a:srgbClr val="6EA8FE"/>
+                </a:solidFill>
+                <a:latin typeface="Arial" pitchFamily="34" charset="0"/>
+                <a:ea typeface="Arial" pitchFamily="34" charset="-122"/>
+                <a:cs typeface="Arial" pitchFamily="34" charset="-120"/>
+              </a:rPr>
+              <a:t>Hands</a:t>
+            </a:r>
+            <a:r>
+              <a:rPr lang="en-US" sz="2400" b="1" dirty="0">
+                <a:solidFill>
+                  <a:srgbClr val="E2E8F0"/>
+                </a:solidFill>
+                <a:latin typeface="Arial" pitchFamily="34" charset="0"/>
+                <a:ea typeface="Arial" pitchFamily="34" charset="-122"/>
+                <a:cs typeface="Arial" pitchFamily="34" charset="-120"/>
+              </a:rPr>
+              <a:t> on the laptop.
+</a:t>
+            </a:r>
+            <a:r>
+              <a:rPr lang="en-US" sz="2400" b="1" dirty="0">
+                <a:solidFill>
+                  <a:srgbClr val="FBBF24"/>
+                </a:solidFill>
+                <a:latin typeface="Arial" pitchFamily="34" charset="0"/>
+                <a:ea typeface="Arial" pitchFamily="34" charset="-122"/>
+                <a:cs typeface="Arial" pitchFamily="34" charset="-120"/>
+              </a:rPr>
+              <a:t>Senses</a:t>
+            </a:r>
+            <a:r>
+              <a:rPr lang="en-US" sz="2400" b="1" dirty="0">
+                <a:solidFill>
+                  <a:srgbClr val="E2E8F0"/>
+                </a:solidFill>
+                <a:latin typeface="Arial" pitchFamily="34" charset="0"/>
+                <a:ea typeface="Arial" pitchFamily="34" charset="-122"/>
+                <a:cs typeface="Arial" pitchFamily="34" charset="-120"/>
+              </a:rPr>
+              <a:t> from SearXNG.  </a:t>
+            </a:r>
+            <a:r>
+              <a:rPr lang="en-US" sz="2400" b="1" dirty="0">
+                <a:solidFill>
+                  <a:srgbClr val="C4B5FD"/>
+                </a:solidFill>
+                <a:latin typeface="Arial" pitchFamily="34" charset="0"/>
+                <a:ea typeface="Arial" pitchFamily="34" charset="-122"/>
+                <a:cs typeface="Arial" pitchFamily="34" charset="-120"/>
+              </a:rPr>
+              <a:t>Personality</a:t>
+            </a:r>
+            <a:r>
+              <a:rPr lang="en-US" sz="2400" b="1" dirty="0">
+                <a:solidFill>
+                  <a:srgbClr val="E2E8F0"/>
+                </a:solidFill>
+                <a:latin typeface="Arial" pitchFamily="34" charset="0"/>
+                <a:ea typeface="Arial" pitchFamily="34" charset="-122"/>
+                <a:cs typeface="Arial" pitchFamily="34" charset="-120"/>
+              </a:rPr>
+              <a:t> in a markdown file.
+Wiring in one config.json.</a:t>
+            </a:r>
+            <a:endParaRPr lang="en-US" sz="2400" dirty="0"/>
+          </a:p>
+        </p:txBody>
+      </p:sp>
+      <p:sp>
+        <p:nvSpPr>
+          <p:cNvPr id="5" name="Shape 2"/>
+          <p:cNvSpPr/>
+          <p:nvPr/>
+        </p:nvSpPr>
+        <p:spPr>
+          <a:xfrm>
+            <a:off x="566928" y="3063240"/>
+            <a:ext cx="11057839" cy="1005840"/>
+          </a:xfrm>
+          <a:prstGeom prst="roundRect">
+            <a:avLst>
+              <a:gd name="adj" fmla="val 7273"/>
+            </a:avLst>
+          </a:prstGeom>
+          <a:solidFill>
+            <a:srgbClr val="141B2B"/>
+          </a:solidFill>
+          <a:ln w="15875">
+            <a:solidFill>
+              <a:srgbClr val="4ADE80"/>
+            </a:solidFill>
+            <a:prstDash val="solid"/>
+          </a:ln>
+        </p:spPr>
+        <p:txBody>
+          <a:bodyPr/>
+          <a:lstStyle/>
+          <a:p>
+            <a:endParaRPr lang="en-US"/>
+          </a:p>
+        </p:txBody>
+      </p:sp>
+      <p:sp>
+        <p:nvSpPr>
+          <p:cNvPr id="6" name="Text 3"/>
+          <p:cNvSpPr txBox="1"/>
+          <p:nvPr/>
+        </p:nvSpPr>
+        <p:spPr>
+          <a:xfrm>
+            <a:off x="566928" y="3063240"/>
+            <a:ext cx="11057839" cy="1005840"/>
+          </a:xfrm>
+          <a:prstGeom prst="rect">
+            <a:avLst/>
+          </a:prstGeom>
+          <a:noFill/>
+          <a:ln/>
+        </p:spPr>
+        <p:txBody>
+          <a:bodyPr wrap="square" lIns="0" tIns="0" rIns="0" bIns="0" rtlCol="0" anchor="ctr"/>
+          <a:lstStyle/>
+          <a:p>
+            <a:pPr marL="0" indent="0" algn="ctr">
+              <a:buNone/>
+            </a:pPr>
+            <a:r>
+              <a:rPr lang="en-US" sz="2200" b="1" dirty="0">
+                <a:solidFill>
+                  <a:srgbClr val="4ADE80"/>
+                </a:solidFill>
+                <a:latin typeface="Courier New" pitchFamily="34" charset="0"/>
+                <a:ea typeface="Courier New" pitchFamily="34" charset="-122"/>
+                <a:cs typeface="Courier New" pitchFamily="34" charset="-120"/>
+              </a:rPr>
+              <a:t>github.com/mcropsey/local-5090-llm-agent-setup</a:t>
+            </a:r>
+            <a:endParaRPr lang="en-US" sz="2200" dirty="0"/>
+          </a:p>
+        </p:txBody>
+      </p:sp>
+      <p:sp>
+        <p:nvSpPr>
+          <p:cNvPr id="7" name="Shape 4"/>
+          <p:cNvSpPr/>
+          <p:nvPr/>
+        </p:nvSpPr>
+        <p:spPr>
+          <a:xfrm>
+            <a:off x="566928" y="4389120"/>
+            <a:ext cx="3520440" cy="1051560"/>
+          </a:xfrm>
+          <a:prstGeom prst="roundRect">
+            <a:avLst>
+              <a:gd name="adj" fmla="val 6957"/>
+            </a:avLst>
+          </a:prstGeom>
+          <a:solidFill>
+            <a:srgbClr val="141B2B"/>
+          </a:solidFill>
+          <a:ln w="15875">
+            <a:solidFill>
+              <a:srgbClr val="273449"/>
+            </a:solidFill>
+            <a:prstDash val="solid"/>
+          </a:ln>
+        </p:spPr>
+        <p:txBody>
+          <a:bodyPr/>
+          <a:lstStyle/>
+          <a:p>
+            <a:endParaRPr lang="en-US"/>
+          </a:p>
+        </p:txBody>
+      </p:sp>
+      <p:sp>
+        <p:nvSpPr>
+          <p:cNvPr id="8" name="Text 5"/>
+          <p:cNvSpPr txBox="1"/>
+          <p:nvPr/>
+        </p:nvSpPr>
+        <p:spPr>
+          <a:xfrm>
+            <a:off x="841248" y="4526280"/>
+            <a:ext cx="2971800" cy="292608"/>
+          </a:xfrm>
+          <a:prstGeom prst="rect">
+            <a:avLst/>
+          </a:prstGeom>
+          <a:noFill/>
+          <a:ln/>
+        </p:spPr>
+        <p:txBody>
+          <a:bodyPr wrap="square" lIns="0" tIns="0" rIns="0" bIns="0" rtlCol="0" anchor="t"/>
+          <a:lstStyle/>
+          <a:p>
+            <a:pPr marL="0" indent="0">
+              <a:buNone/>
+            </a:pPr>
+            <a:r>
+              <a:rPr lang="en-US" sz="1300" b="1" dirty="0">
+                <a:solidFill>
+                  <a:srgbClr val="4ADE80"/>
+                </a:solidFill>
+                <a:latin typeface="Courier New" pitchFamily="34" charset="0"/>
+                <a:ea typeface="Courier New" pitchFamily="34" charset="-122"/>
+                <a:cs typeface="Courier New" pitchFamily="34" charset="-120"/>
+              </a:rPr>
+              <a:t>runbook.md</a:t>
+            </a:r>
+            <a:endParaRPr lang="en-US" sz="1300" dirty="0"/>
+          </a:p>
+        </p:txBody>
+      </p:sp>
+      <p:sp>
+        <p:nvSpPr>
+          <p:cNvPr id="9" name="Text 6"/>
+          <p:cNvSpPr txBox="1"/>
+          <p:nvPr/>
+        </p:nvSpPr>
+        <p:spPr>
+          <a:xfrm>
+            <a:off x="841248" y="4846320"/>
+            <a:ext cx="2971800" cy="548640"/>
+          </a:xfrm>
+          <a:prstGeom prst="rect">
+            <a:avLst/>
+          </a:prstGeom>
+          <a:noFill/>
+          <a:ln/>
+        </p:spPr>
+        <p:txBody>
+          <a:bodyPr wrap="square" lIns="0" tIns="0" rIns="0" bIns="0" rtlCol="0" anchor="t"/>
+          <a:lstStyle/>
+          <a:p>
+            <a:pPr marL="0" indent="0">
+              <a:buNone/>
+            </a:pPr>
+            <a:r>
+              <a:rPr lang="en-US" sz="1150" dirty="0">
+                <a:solidFill>
+                  <a:srgbClr val="94A3B8"/>
+                </a:solidFill>
+                <a:latin typeface="Calibri" pitchFamily="34" charset="0"/>
+                <a:ea typeface="Calibri" pitchFamily="34" charset="-122"/>
+                <a:cs typeface="Calibri" pitchFamily="34" charset="-120"/>
+              </a:rPr>
+              <a:t>how to build it, phase by phase — including the full config.json</a:t>
+            </a:r>
+            <a:endParaRPr lang="en-US" sz="1150" dirty="0"/>
+          </a:p>
+        </p:txBody>
+      </p:sp>
+      <p:sp>
+        <p:nvSpPr>
+          <p:cNvPr id="10" name="Shape 7"/>
+          <p:cNvSpPr/>
+          <p:nvPr/>
+        </p:nvSpPr>
+        <p:spPr>
+          <a:xfrm>
+            <a:off x="4335628" y="4389120"/>
+            <a:ext cx="3520440" cy="1051560"/>
+          </a:xfrm>
+          <a:prstGeom prst="roundRect">
+            <a:avLst>
+              <a:gd name="adj" fmla="val 6957"/>
+            </a:avLst>
+          </a:prstGeom>
+          <a:solidFill>
+            <a:srgbClr val="141B2B"/>
+          </a:solidFill>
+          <a:ln w="15875">
+            <a:solidFill>
+              <a:srgbClr val="273449"/>
+            </a:solidFill>
+            <a:prstDash val="solid"/>
+          </a:ln>
+        </p:spPr>
+        <p:txBody>
+          <a:bodyPr/>
+          <a:lstStyle/>
+          <a:p>
+            <a:endParaRPr lang="en-US"/>
+          </a:p>
+        </p:txBody>
+      </p:sp>
+      <p:sp>
+        <p:nvSpPr>
+          <p:cNvPr id="11" name="Text 8"/>
+          <p:cNvSpPr txBox="1"/>
+          <p:nvPr/>
+        </p:nvSpPr>
+        <p:spPr>
+          <a:xfrm>
+            <a:off x="4609948" y="4526280"/>
+            <a:ext cx="2971800" cy="292608"/>
+          </a:xfrm>
+          <a:prstGeom prst="rect">
+            <a:avLst/>
+          </a:prstGeom>
+          <a:noFill/>
+          <a:ln/>
+        </p:spPr>
+        <p:txBody>
+          <a:bodyPr wrap="square" lIns="0" tIns="0" rIns="0" bIns="0" rtlCol="0" anchor="t"/>
+          <a:lstStyle/>
+          <a:p>
+            <a:pPr marL="0" indent="0">
+              <a:buNone/>
+            </a:pPr>
+            <a:r>
+              <a:rPr lang="en-US" sz="1300" b="1" dirty="0">
+                <a:solidFill>
+                  <a:srgbClr val="6EA8FE"/>
+                </a:solidFill>
+                <a:latin typeface="Courier New" pitchFamily="34" charset="0"/>
+                <a:ea typeface="Courier New" pitchFamily="34" charset="-122"/>
+                <a:cs typeface="Courier New" pitchFamily="34" charset="-120"/>
+              </a:rPr>
+              <a:t>reference.md</a:t>
+            </a:r>
+            <a:endParaRPr lang="en-US" sz="1300" dirty="0"/>
+          </a:p>
+        </p:txBody>
+      </p:sp>
+      <p:sp>
+        <p:nvSpPr>
+          <p:cNvPr id="12" name="Text 9"/>
+          <p:cNvSpPr txBox="1"/>
+          <p:nvPr/>
+        </p:nvSpPr>
+        <p:spPr>
+          <a:xfrm>
+            <a:off x="4609948" y="4846320"/>
+            <a:ext cx="2971800" cy="548640"/>
+          </a:xfrm>
+          <a:prstGeom prst="rect">
+            <a:avLst/>
+          </a:prstGeom>
+          <a:noFill/>
+          <a:ln/>
+        </p:spPr>
+        <p:txBody>
+          <a:bodyPr wrap="square" lIns="0" tIns="0" rIns="0" bIns="0" rtlCol="0" anchor="t"/>
+          <a:lstStyle/>
+          <a:p>
+            <a:pPr marL="0" indent="0">
+              <a:buNone/>
+            </a:pPr>
+            <a:r>
+              <a:rPr lang="en-US" sz="1150" dirty="0">
+                <a:solidFill>
+                  <a:srgbClr val="94A3B8"/>
+                </a:solidFill>
+                <a:latin typeface="Calibri" pitchFamily="34" charset="0"/>
+                <a:ea typeface="Calibri" pitchFamily="34" charset="-122"/>
+                <a:cs typeface="Calibri" pitchFamily="34" charset="-120"/>
+              </a:rPr>
+              <a:t>why it works that way, and the failure map for when it breaks</a:t>
+            </a:r>
+            <a:endParaRPr lang="en-US" sz="1150" dirty="0"/>
+          </a:p>
+        </p:txBody>
+      </p:sp>
+      <p:sp>
+        <p:nvSpPr>
+          <p:cNvPr id="13" name="Shape 10"/>
+          <p:cNvSpPr/>
+          <p:nvPr/>
+        </p:nvSpPr>
+        <p:spPr>
+          <a:xfrm>
+            <a:off x="8104327" y="4389120"/>
+            <a:ext cx="3520440" cy="1051560"/>
+          </a:xfrm>
+          <a:prstGeom prst="roundRect">
+            <a:avLst>
+              <a:gd name="adj" fmla="val 6957"/>
+            </a:avLst>
+          </a:prstGeom>
+          <a:solidFill>
+            <a:srgbClr val="141B2B"/>
+          </a:solidFill>
+          <a:ln w="15875">
+            <a:solidFill>
+              <a:srgbClr val="273449"/>
+            </a:solidFill>
+            <a:prstDash val="solid"/>
+          </a:ln>
+        </p:spPr>
+        <p:txBody>
+          <a:bodyPr/>
+          <a:lstStyle/>
+          <a:p>
+            <a:endParaRPr lang="en-US"/>
+          </a:p>
+        </p:txBody>
+      </p:sp>
+      <p:sp>
+        <p:nvSpPr>
+          <p:cNvPr id="14" name="Text 11"/>
+          <p:cNvSpPr txBox="1"/>
+          <p:nvPr/>
+        </p:nvSpPr>
+        <p:spPr>
+          <a:xfrm>
+            <a:off x="8378647" y="4526280"/>
+            <a:ext cx="2971800" cy="292608"/>
+          </a:xfrm>
+          <a:prstGeom prst="rect">
+            <a:avLst/>
+          </a:prstGeom>
+          <a:noFill/>
+          <a:ln/>
+        </p:spPr>
+        <p:txBody>
+          <a:bodyPr wrap="square" lIns="0" tIns="0" rIns="0" bIns="0" rtlCol="0" anchor="t"/>
+          <a:lstStyle/>
+          <a:p>
+            <a:pPr marL="0" indent="0">
+              <a:buNone/>
+            </a:pPr>
+            <a:r>
+              <a:rPr lang="en-US" sz="1300" b="1" dirty="0">
+                <a:solidFill>
+                  <a:srgbClr val="FBBF24"/>
+                </a:solidFill>
+                <a:latin typeface="Courier New" pitchFamily="34" charset="0"/>
+                <a:ea typeface="Courier New" pitchFamily="34" charset="-122"/>
+                <a:cs typeface="Courier New" pitchFamily="34" charset="-120"/>
+              </a:rPr>
+              <a:t>mcp-servers.md</a:t>
+            </a:r>
+            <a:endParaRPr lang="en-US" sz="1300" dirty="0"/>
+          </a:p>
+        </p:txBody>
+      </p:sp>
+      <p:sp>
+        <p:nvSpPr>
+          <p:cNvPr id="15" name="Text 12"/>
+          <p:cNvSpPr txBox="1"/>
+          <p:nvPr/>
+        </p:nvSpPr>
+        <p:spPr>
+          <a:xfrm>
+            <a:off x="8378647" y="4846320"/>
+            <a:ext cx="2971800" cy="548640"/>
+          </a:xfrm>
+          <a:prstGeom prst="rect">
+            <a:avLst/>
+          </a:prstGeom>
+          <a:noFill/>
+          <a:ln/>
+        </p:spPr>
+        <p:txBody>
+          <a:bodyPr wrap="square" lIns="0" tIns="0" rIns="0" bIns="0" rtlCol="0" anchor="t"/>
+          <a:lstStyle/>
+          <a:p>
+            <a:pPr marL="0" indent="0">
+              <a:buNone/>
+            </a:pPr>
+            <a:r>
+              <a:rPr lang="en-US" sz="1150" dirty="0">
+                <a:solidFill>
+                  <a:srgbClr val="94A3B8"/>
+                </a:solidFill>
+                <a:latin typeface="Calibri" pitchFamily="34" charset="0"/>
+                <a:ea typeface="Calibri" pitchFamily="34" charset="-122"/>
+                <a:cs typeface="Calibri" pitchFamily="34" charset="-120"/>
+              </a:rPr>
+              <a:t>turning senses on and off, and what each one costs per request</a:t>
+            </a:r>
+            <a:endParaRPr lang="en-US" sz="1150" dirty="0"/>
+          </a:p>
+        </p:txBody>
+      </p:sp>
+      <p:sp>
+        <p:nvSpPr>
+          <p:cNvPr id="16" name="Text 13"/>
+          <p:cNvSpPr txBox="1"/>
+          <p:nvPr/>
+        </p:nvSpPr>
+        <p:spPr>
+          <a:xfrm>
+            <a:off x="566928" y="5852160"/>
+            <a:ext cx="11057839" cy="274320"/>
+          </a:xfrm>
+          <a:prstGeom prst="rect">
+            <a:avLst/>
+          </a:prstGeom>
+          <a:noFill/>
+          <a:ln/>
+        </p:spPr>
+        <p:txBody>
+          <a:bodyPr wrap="square" lIns="0" tIns="0" rIns="0" bIns="0" rtlCol="0" anchor="t"/>
+          <a:lstStyle/>
+          <a:p>
+            <a:pPr marL="0" indent="0">
+              <a:buNone/>
+            </a:pPr>
+            <a:r>
+              <a:rPr lang="en-US" sz="1200" dirty="0">
+                <a:solidFill>
+                  <a:srgbClr val="64748B"/>
+                </a:solidFill>
+                <a:latin typeface="Calibri" pitchFamily="34" charset="0"/>
+                <a:ea typeface="Calibri" pitchFamily="34" charset="-122"/>
+                <a:cs typeface="Calibri" pitchFamily="34" charset="-120"/>
+              </a:rPr>
+              <a:t>Mike Cropsey</a:t>
+            </a:r>
+            <a:endParaRPr lang="en-US" sz="1200" dirty="0"/>
+          </a:p>
+        </p:txBody>
+      </p:sp>
+    </p:spTree>
+  </p:cSld>
+  <p:clrMapOvr>
+    <a:masterClrMapping/>
+  </p:clrMapOvr>
+</p:sld>
+</file>
+
+<file path=ppt/slides/slide2.xml><?xml version="1.0" encoding="utf-8"?>
+<p:sld xmlns:a="http://schemas.openxmlformats.org/drawingml/2006/main" xmlns:r="http://schemas.openxmlformats.org/officeDocument/2006/relationships" xmlns:p="http://schemas.openxmlformats.org/presentationml/2006/main">
   <p:cSld name="Slide 1">
     <p:bg>
       <p:bgPr>
@@ -1810,7 +2819,7 @@
 </p:sld>
 </file>
 
-<file path=ppt/slides/slide2.xml><?xml version="1.0" encoding="utf-8"?>
+<file path=ppt/slides/slide3.xml><?xml version="1.0" encoding="utf-8"?>
 <p:sld xmlns:a="http://schemas.openxmlformats.org/drawingml/2006/main" xmlns:r="http://schemas.openxmlformats.org/officeDocument/2006/relationships" xmlns:p="http://schemas.openxmlformats.org/presentationml/2006/main">
   <p:cSld name="Slide 2">
     <p:bg>
@@ -3211,7 +4220,7 @@
 </p:sld>
 </file>
 
-<file path=ppt/slides/slide3.xml><?xml version="1.0" encoding="utf-8"?>
+<file path=ppt/slides/slide4.xml><?xml version="1.0" encoding="utf-8"?>
 <p:sld xmlns:a="http://schemas.openxmlformats.org/drawingml/2006/main" xmlns:r="http://schemas.openxmlformats.org/officeDocument/2006/relationships" xmlns:p="http://schemas.openxmlformats.org/presentationml/2006/main">
   <p:cSld name="Slide 3">
     <p:bg>
@@ -4318,7 +5327,7 @@
 </p:sld>
 </file>
 
-<file path=ppt/slides/slide4.xml><?xml version="1.0" encoding="utf-8"?>
+<file path=ppt/slides/slide5.xml><?xml version="1.0" encoding="utf-8"?>
 <p:sld xmlns:a="http://schemas.openxmlformats.org/drawingml/2006/main" xmlns:r="http://schemas.openxmlformats.org/officeDocument/2006/relationships" xmlns:p="http://schemas.openxmlformats.org/presentationml/2006/main">
   <p:cSld name="Slide 4">
     <p:bg>
@@ -5598,7 +6607,7 @@
 </p:sld>
 </file>
 
-<file path=ppt/slides/slide5.xml><?xml version="1.0" encoding="utf-8"?>
+<file path=ppt/slides/slide6.xml><?xml version="1.0" encoding="utf-8"?>
 <p:sld xmlns:a="http://schemas.openxmlformats.org/drawingml/2006/main" xmlns:r="http://schemas.openxmlformats.org/officeDocument/2006/relationships" xmlns:p="http://schemas.openxmlformats.org/presentationml/2006/main">
   <p:cSld name="Slide 5">
     <p:bg>
@@ -6707,7 +7716,7 @@
 </p:sld>
 </file>
 
-<file path=ppt/slides/slide6.xml><?xml version="1.0" encoding="utf-8"?>
+<file path=ppt/slides/slide7.xml><?xml version="1.0" encoding="utf-8"?>
 <p:sld xmlns:a="http://schemas.openxmlformats.org/drawingml/2006/main" xmlns:r="http://schemas.openxmlformats.org/officeDocument/2006/relationships" xmlns:p="http://schemas.openxmlformats.org/presentationml/2006/main">
   <p:cSld name="Slide 6">
     <p:bg>
@@ -8441,7 +9450,7 @@
 </p:sld>
 </file>
 
-<file path=ppt/slides/slide7.xml><?xml version="1.0" encoding="utf-8"?>
+<file path=ppt/slides/slide8.xml><?xml version="1.0" encoding="utf-8"?>
 <p:sld xmlns:a="http://schemas.openxmlformats.org/drawingml/2006/main" xmlns:r="http://schemas.openxmlformats.org/officeDocument/2006/relationships" xmlns:p="http://schemas.openxmlformats.org/presentationml/2006/main">
   <p:cSld name="Slide 7">
     <p:bg>
@@ -9471,7 +10480,7 @@
 </p:sld>
 </file>
 
-<file path=ppt/slides/slide8.xml><?xml version="1.0" encoding="utf-8"?>
+<file path=ppt/slides/slide9.xml><?xml version="1.0" encoding="utf-8"?>
 <p:sld xmlns:a="http://schemas.openxmlformats.org/drawingml/2006/main" xmlns:r="http://schemas.openxmlformats.org/officeDocument/2006/relationships" xmlns:p="http://schemas.openxmlformats.org/presentationml/2006/main">
   <p:cSld name="Slide 8">
     <p:bg>
@@ -10511,647 +11520,6 @@
               <a:t>After every demo we check — a browser, a curl, a podman ps. Small models over-claim; the habit worth modeling is verifying.</a:t>
             </a:r>
             <a:endParaRPr lang="en-US" sz="1500" dirty="0"/>
-          </a:p>
-        </p:txBody>
-      </p:sp>
-    </p:spTree>
-  </p:cSld>
-  <p:clrMapOvr>
-    <a:masterClrMapping/>
-  </p:clrMapOvr>
-</p:sld>
-</file>
-
-<file path=ppt/slides/slide9.xml><?xml version="1.0" encoding="utf-8"?>
-<p:sld xmlns:a="http://schemas.openxmlformats.org/drawingml/2006/main" xmlns:r="http://schemas.openxmlformats.org/officeDocument/2006/relationships" xmlns:p="http://schemas.openxmlformats.org/presentationml/2006/main">
-  <p:cSld name="Slide 9">
-    <p:bg>
-      <p:bgPr>
-        <a:solidFill>
-          <a:srgbClr val="0F1319"/>
-        </a:solidFill>
-        <a:effectLst/>
-      </p:bgPr>
-    </p:bg>
-    <p:spTree>
-      <p:nvGrpSpPr>
-        <p:cNvPr id="1" name=""/>
-        <p:cNvGrpSpPr/>
-        <p:nvPr/>
-      </p:nvGrpSpPr>
-      <p:grpSpPr>
-        <a:xfrm>
-          <a:off x="0" y="0"/>
-          <a:ext cx="0" cy="0"/>
-          <a:chOff x="0" y="0"/>
-          <a:chExt cx="0" cy="0"/>
-        </a:xfrm>
-      </p:grpSpPr>
-      <p:sp>
-        <p:nvSpPr>
-          <p:cNvPr id="3" name="Text 0"/>
-          <p:cNvSpPr txBox="1"/>
-          <p:nvPr/>
-        </p:nvSpPr>
-        <p:spPr>
-          <a:xfrm>
-            <a:off x="566928" y="822960"/>
-            <a:ext cx="11057839" cy="292608"/>
-          </a:xfrm>
-          <a:prstGeom prst="rect">
-            <a:avLst/>
-          </a:prstGeom>
-          <a:noFill/>
-          <a:ln/>
-        </p:spPr>
-        <p:txBody>
-          <a:bodyPr wrap="square" lIns="0" tIns="0" rIns="0" bIns="0" rtlCol="0" anchor="t"/>
-          <a:lstStyle/>
-          <a:p>
-            <a:pPr marL="0" indent="0">
-              <a:buNone/>
-            </a:pPr>
-            <a:r>
-              <a:rPr lang="en-US" sz="1100" b="1" kern="0" spc="300" dirty="0">
-                <a:solidFill>
-                  <a:srgbClr val="4ADE80"/>
-                </a:solidFill>
-                <a:latin typeface="Arial" pitchFamily="34" charset="0"/>
-                <a:ea typeface="Arial" pitchFamily="34" charset="-122"/>
-                <a:cs typeface="Arial" pitchFamily="34" charset="-120"/>
-              </a:rPr>
-              <a:t>EVERY FILE I JUST USED</a:t>
-            </a:r>
-            <a:endParaRPr lang="en-US" sz="1100" dirty="0"/>
-          </a:p>
-        </p:txBody>
-      </p:sp>
-      <p:sp>
-        <p:nvSpPr>
-          <p:cNvPr id="4" name="Text 1"/>
-          <p:cNvSpPr txBox="1"/>
-          <p:nvPr/>
-        </p:nvSpPr>
-        <p:spPr>
-          <a:xfrm>
-            <a:off x="566928" y="1188720"/>
-            <a:ext cx="11057839" cy="1645920"/>
-          </a:xfrm>
-          <a:prstGeom prst="rect">
-            <a:avLst/>
-          </a:prstGeom>
-          <a:noFill/>
-          <a:ln/>
-        </p:spPr>
-        <p:txBody>
-          <a:bodyPr wrap="square" lIns="0" tIns="0" rIns="0" bIns="0" rtlCol="0" anchor="t"/>
-          <a:lstStyle/>
-          <a:p>
-            <a:pPr marL="0" indent="0">
-              <a:lnSpc>
-                <a:spcPct val="115000"/>
-              </a:lnSpc>
-              <a:buNone/>
-            </a:pPr>
-            <a:r>
-              <a:rPr lang="en-US" sz="2400" b="1" dirty="0">
-                <a:solidFill>
-                  <a:srgbClr val="4ADE80"/>
-                </a:solidFill>
-                <a:latin typeface="Arial" pitchFamily="34" charset="0"/>
-                <a:ea typeface="Arial" pitchFamily="34" charset="-122"/>
-                <a:cs typeface="Arial" pitchFamily="34" charset="-120"/>
-              </a:rPr>
-              <a:t>Brain</a:t>
-            </a:r>
-            <a:r>
-              <a:rPr lang="en-US" sz="2400" b="1" dirty="0">
-                <a:solidFill>
-                  <a:srgbClr val="E2E8F0"/>
-                </a:solidFill>
-                <a:latin typeface="Arial" pitchFamily="34" charset="0"/>
-                <a:ea typeface="Arial" pitchFamily="34" charset="-122"/>
-                <a:cs typeface="Arial" pitchFamily="34" charset="-120"/>
-              </a:rPr>
-              <a:t> on the 5090.  </a:t>
-            </a:r>
-            <a:r>
-              <a:rPr lang="en-US" sz="2400" b="1" dirty="0">
-                <a:solidFill>
-                  <a:srgbClr val="6EA8FE"/>
-                </a:solidFill>
-                <a:latin typeface="Arial" pitchFamily="34" charset="0"/>
-                <a:ea typeface="Arial" pitchFamily="34" charset="-122"/>
-                <a:cs typeface="Arial" pitchFamily="34" charset="-120"/>
-              </a:rPr>
-              <a:t>Hands</a:t>
-            </a:r>
-            <a:r>
-              <a:rPr lang="en-US" sz="2400" b="1" dirty="0">
-                <a:solidFill>
-                  <a:srgbClr val="E2E8F0"/>
-                </a:solidFill>
-                <a:latin typeface="Arial" pitchFamily="34" charset="0"/>
-                <a:ea typeface="Arial" pitchFamily="34" charset="-122"/>
-                <a:cs typeface="Arial" pitchFamily="34" charset="-120"/>
-              </a:rPr>
-              <a:t> on the laptop.
-</a:t>
-            </a:r>
-            <a:r>
-              <a:rPr lang="en-US" sz="2400" b="1" dirty="0">
-                <a:solidFill>
-                  <a:srgbClr val="FBBF24"/>
-                </a:solidFill>
-                <a:latin typeface="Arial" pitchFamily="34" charset="0"/>
-                <a:ea typeface="Arial" pitchFamily="34" charset="-122"/>
-                <a:cs typeface="Arial" pitchFamily="34" charset="-120"/>
-              </a:rPr>
-              <a:t>Senses</a:t>
-            </a:r>
-            <a:r>
-              <a:rPr lang="en-US" sz="2400" b="1" dirty="0">
-                <a:solidFill>
-                  <a:srgbClr val="E2E8F0"/>
-                </a:solidFill>
-                <a:latin typeface="Arial" pitchFamily="34" charset="0"/>
-                <a:ea typeface="Arial" pitchFamily="34" charset="-122"/>
-                <a:cs typeface="Arial" pitchFamily="34" charset="-120"/>
-              </a:rPr>
-              <a:t> from SearXNG.  </a:t>
-            </a:r>
-            <a:r>
-              <a:rPr lang="en-US" sz="2400" b="1" dirty="0">
-                <a:solidFill>
-                  <a:srgbClr val="C4B5FD"/>
-                </a:solidFill>
-                <a:latin typeface="Arial" pitchFamily="34" charset="0"/>
-                <a:ea typeface="Arial" pitchFamily="34" charset="-122"/>
-                <a:cs typeface="Arial" pitchFamily="34" charset="-120"/>
-              </a:rPr>
-              <a:t>Personality</a:t>
-            </a:r>
-            <a:r>
-              <a:rPr lang="en-US" sz="2400" b="1" dirty="0">
-                <a:solidFill>
-                  <a:srgbClr val="E2E8F0"/>
-                </a:solidFill>
-                <a:latin typeface="Arial" pitchFamily="34" charset="0"/>
-                <a:ea typeface="Arial" pitchFamily="34" charset="-122"/>
-                <a:cs typeface="Arial" pitchFamily="34" charset="-120"/>
-              </a:rPr>
-              <a:t> in a markdown file.
-Wiring in one config.json.</a:t>
-            </a:r>
-            <a:endParaRPr lang="en-US" sz="2400" dirty="0"/>
-          </a:p>
-        </p:txBody>
-      </p:sp>
-      <p:sp>
-        <p:nvSpPr>
-          <p:cNvPr id="5" name="Shape 2"/>
-          <p:cNvSpPr/>
-          <p:nvPr/>
-        </p:nvSpPr>
-        <p:spPr>
-          <a:xfrm>
-            <a:off x="566928" y="3063240"/>
-            <a:ext cx="11057839" cy="1005840"/>
-          </a:xfrm>
-          <a:prstGeom prst="roundRect">
-            <a:avLst>
-              <a:gd name="adj" fmla="val 7273"/>
-            </a:avLst>
-          </a:prstGeom>
-          <a:solidFill>
-            <a:srgbClr val="141B2B"/>
-          </a:solidFill>
-          <a:ln w="15875">
-            <a:solidFill>
-              <a:srgbClr val="4ADE80"/>
-            </a:solidFill>
-            <a:prstDash val="solid"/>
-          </a:ln>
-        </p:spPr>
-        <p:txBody>
-          <a:bodyPr/>
-          <a:lstStyle/>
-          <a:p>
-            <a:endParaRPr lang="en-US"/>
-          </a:p>
-        </p:txBody>
-      </p:sp>
-      <p:sp>
-        <p:nvSpPr>
-          <p:cNvPr id="6" name="Text 3"/>
-          <p:cNvSpPr txBox="1"/>
-          <p:nvPr/>
-        </p:nvSpPr>
-        <p:spPr>
-          <a:xfrm>
-            <a:off x="566928" y="3063240"/>
-            <a:ext cx="11057839" cy="1005840"/>
-          </a:xfrm>
-          <a:prstGeom prst="rect">
-            <a:avLst/>
-          </a:prstGeom>
-          <a:noFill/>
-          <a:ln/>
-        </p:spPr>
-        <p:txBody>
-          <a:bodyPr wrap="square" lIns="0" tIns="0" rIns="0" bIns="0" rtlCol="0" anchor="ctr"/>
-          <a:lstStyle/>
-          <a:p>
-            <a:pPr marL="0" indent="0" algn="ctr">
-              <a:buNone/>
-            </a:pPr>
-            <a:r>
-              <a:rPr lang="en-US" sz="2200" b="1" dirty="0">
-                <a:solidFill>
-                  <a:srgbClr val="4ADE80"/>
-                </a:solidFill>
-                <a:latin typeface="Courier New" pitchFamily="34" charset="0"/>
-                <a:ea typeface="Courier New" pitchFamily="34" charset="-122"/>
-                <a:cs typeface="Courier New" pitchFamily="34" charset="-120"/>
-              </a:rPr>
-              <a:t>github.com/mcropsey/local-5090-llm-agent-setup</a:t>
-            </a:r>
-            <a:endParaRPr lang="en-US" sz="2200" dirty="0"/>
-          </a:p>
-        </p:txBody>
-      </p:sp>
-      <p:sp>
-        <p:nvSpPr>
-          <p:cNvPr id="7" name="Shape 4"/>
-          <p:cNvSpPr/>
-          <p:nvPr/>
-        </p:nvSpPr>
-        <p:spPr>
-          <a:xfrm>
-            <a:off x="566928" y="4389120"/>
-            <a:ext cx="3520440" cy="1051560"/>
-          </a:xfrm>
-          <a:prstGeom prst="roundRect">
-            <a:avLst>
-              <a:gd name="adj" fmla="val 6957"/>
-            </a:avLst>
-          </a:prstGeom>
-          <a:solidFill>
-            <a:srgbClr val="141B2B"/>
-          </a:solidFill>
-          <a:ln w="15875">
-            <a:solidFill>
-              <a:srgbClr val="273449"/>
-            </a:solidFill>
-            <a:prstDash val="solid"/>
-          </a:ln>
-        </p:spPr>
-        <p:txBody>
-          <a:bodyPr/>
-          <a:lstStyle/>
-          <a:p>
-            <a:endParaRPr lang="en-US"/>
-          </a:p>
-        </p:txBody>
-      </p:sp>
-      <p:sp>
-        <p:nvSpPr>
-          <p:cNvPr id="8" name="Text 5"/>
-          <p:cNvSpPr txBox="1"/>
-          <p:nvPr/>
-        </p:nvSpPr>
-        <p:spPr>
-          <a:xfrm>
-            <a:off x="841248" y="4526280"/>
-            <a:ext cx="2971800" cy="292608"/>
-          </a:xfrm>
-          <a:prstGeom prst="rect">
-            <a:avLst/>
-          </a:prstGeom>
-          <a:noFill/>
-          <a:ln/>
-        </p:spPr>
-        <p:txBody>
-          <a:bodyPr wrap="square" lIns="0" tIns="0" rIns="0" bIns="0" rtlCol="0" anchor="t"/>
-          <a:lstStyle/>
-          <a:p>
-            <a:pPr marL="0" indent="0">
-              <a:buNone/>
-            </a:pPr>
-            <a:r>
-              <a:rPr lang="en-US" sz="1300" b="1" dirty="0">
-                <a:solidFill>
-                  <a:srgbClr val="4ADE80"/>
-                </a:solidFill>
-                <a:latin typeface="Courier New" pitchFamily="34" charset="0"/>
-                <a:ea typeface="Courier New" pitchFamily="34" charset="-122"/>
-                <a:cs typeface="Courier New" pitchFamily="34" charset="-120"/>
-              </a:rPr>
-              <a:t>runbook.md</a:t>
-            </a:r>
-            <a:endParaRPr lang="en-US" sz="1300" dirty="0"/>
-          </a:p>
-        </p:txBody>
-      </p:sp>
-      <p:sp>
-        <p:nvSpPr>
-          <p:cNvPr id="9" name="Text 6"/>
-          <p:cNvSpPr txBox="1"/>
-          <p:nvPr/>
-        </p:nvSpPr>
-        <p:spPr>
-          <a:xfrm>
-            <a:off x="841248" y="4846320"/>
-            <a:ext cx="2971800" cy="548640"/>
-          </a:xfrm>
-          <a:prstGeom prst="rect">
-            <a:avLst/>
-          </a:prstGeom>
-          <a:noFill/>
-          <a:ln/>
-        </p:spPr>
-        <p:txBody>
-          <a:bodyPr wrap="square" lIns="0" tIns="0" rIns="0" bIns="0" rtlCol="0" anchor="t"/>
-          <a:lstStyle/>
-          <a:p>
-            <a:pPr marL="0" indent="0">
-              <a:buNone/>
-            </a:pPr>
-            <a:r>
-              <a:rPr lang="en-US" sz="1150" dirty="0">
-                <a:solidFill>
-                  <a:srgbClr val="94A3B8"/>
-                </a:solidFill>
-                <a:latin typeface="Calibri" pitchFamily="34" charset="0"/>
-                <a:ea typeface="Calibri" pitchFamily="34" charset="-122"/>
-                <a:cs typeface="Calibri" pitchFamily="34" charset="-120"/>
-              </a:rPr>
-              <a:t>how to build it, phase by phase — including the full config.json</a:t>
-            </a:r>
-            <a:endParaRPr lang="en-US" sz="1150" dirty="0"/>
-          </a:p>
-        </p:txBody>
-      </p:sp>
-      <p:sp>
-        <p:nvSpPr>
-          <p:cNvPr id="10" name="Shape 7"/>
-          <p:cNvSpPr/>
-          <p:nvPr/>
-        </p:nvSpPr>
-        <p:spPr>
-          <a:xfrm>
-            <a:off x="4335628" y="4389120"/>
-            <a:ext cx="3520440" cy="1051560"/>
-          </a:xfrm>
-          <a:prstGeom prst="roundRect">
-            <a:avLst>
-              <a:gd name="adj" fmla="val 6957"/>
-            </a:avLst>
-          </a:prstGeom>
-          <a:solidFill>
-            <a:srgbClr val="141B2B"/>
-          </a:solidFill>
-          <a:ln w="15875">
-            <a:solidFill>
-              <a:srgbClr val="273449"/>
-            </a:solidFill>
-            <a:prstDash val="solid"/>
-          </a:ln>
-        </p:spPr>
-        <p:txBody>
-          <a:bodyPr/>
-          <a:lstStyle/>
-          <a:p>
-            <a:endParaRPr lang="en-US"/>
-          </a:p>
-        </p:txBody>
-      </p:sp>
-      <p:sp>
-        <p:nvSpPr>
-          <p:cNvPr id="11" name="Text 8"/>
-          <p:cNvSpPr txBox="1"/>
-          <p:nvPr/>
-        </p:nvSpPr>
-        <p:spPr>
-          <a:xfrm>
-            <a:off x="4609948" y="4526280"/>
-            <a:ext cx="2971800" cy="292608"/>
-          </a:xfrm>
-          <a:prstGeom prst="rect">
-            <a:avLst/>
-          </a:prstGeom>
-          <a:noFill/>
-          <a:ln/>
-        </p:spPr>
-        <p:txBody>
-          <a:bodyPr wrap="square" lIns="0" tIns="0" rIns="0" bIns="0" rtlCol="0" anchor="t"/>
-          <a:lstStyle/>
-          <a:p>
-            <a:pPr marL="0" indent="0">
-              <a:buNone/>
-            </a:pPr>
-            <a:r>
-              <a:rPr lang="en-US" sz="1300" b="1" dirty="0">
-                <a:solidFill>
-                  <a:srgbClr val="6EA8FE"/>
-                </a:solidFill>
-                <a:latin typeface="Courier New" pitchFamily="34" charset="0"/>
-                <a:ea typeface="Courier New" pitchFamily="34" charset="-122"/>
-                <a:cs typeface="Courier New" pitchFamily="34" charset="-120"/>
-              </a:rPr>
-              <a:t>reference.md</a:t>
-            </a:r>
-            <a:endParaRPr lang="en-US" sz="1300" dirty="0"/>
-          </a:p>
-        </p:txBody>
-      </p:sp>
-      <p:sp>
-        <p:nvSpPr>
-          <p:cNvPr id="12" name="Text 9"/>
-          <p:cNvSpPr txBox="1"/>
-          <p:nvPr/>
-        </p:nvSpPr>
-        <p:spPr>
-          <a:xfrm>
-            <a:off x="4609948" y="4846320"/>
-            <a:ext cx="2971800" cy="548640"/>
-          </a:xfrm>
-          <a:prstGeom prst="rect">
-            <a:avLst/>
-          </a:prstGeom>
-          <a:noFill/>
-          <a:ln/>
-        </p:spPr>
-        <p:txBody>
-          <a:bodyPr wrap="square" lIns="0" tIns="0" rIns="0" bIns="0" rtlCol="0" anchor="t"/>
-          <a:lstStyle/>
-          <a:p>
-            <a:pPr marL="0" indent="0">
-              <a:buNone/>
-            </a:pPr>
-            <a:r>
-              <a:rPr lang="en-US" sz="1150" dirty="0">
-                <a:solidFill>
-                  <a:srgbClr val="94A3B8"/>
-                </a:solidFill>
-                <a:latin typeface="Calibri" pitchFamily="34" charset="0"/>
-                <a:ea typeface="Calibri" pitchFamily="34" charset="-122"/>
-                <a:cs typeface="Calibri" pitchFamily="34" charset="-120"/>
-              </a:rPr>
-              <a:t>why it works that way, and the failure map for when it breaks</a:t>
-            </a:r>
-            <a:endParaRPr lang="en-US" sz="1150" dirty="0"/>
-          </a:p>
-        </p:txBody>
-      </p:sp>
-      <p:sp>
-        <p:nvSpPr>
-          <p:cNvPr id="13" name="Shape 10"/>
-          <p:cNvSpPr/>
-          <p:nvPr/>
-        </p:nvSpPr>
-        <p:spPr>
-          <a:xfrm>
-            <a:off x="8104327" y="4389120"/>
-            <a:ext cx="3520440" cy="1051560"/>
-          </a:xfrm>
-          <a:prstGeom prst="roundRect">
-            <a:avLst>
-              <a:gd name="adj" fmla="val 6957"/>
-            </a:avLst>
-          </a:prstGeom>
-          <a:solidFill>
-            <a:srgbClr val="141B2B"/>
-          </a:solidFill>
-          <a:ln w="15875">
-            <a:solidFill>
-              <a:srgbClr val="273449"/>
-            </a:solidFill>
-            <a:prstDash val="solid"/>
-          </a:ln>
-        </p:spPr>
-        <p:txBody>
-          <a:bodyPr/>
-          <a:lstStyle/>
-          <a:p>
-            <a:endParaRPr lang="en-US"/>
-          </a:p>
-        </p:txBody>
-      </p:sp>
-      <p:sp>
-        <p:nvSpPr>
-          <p:cNvPr id="14" name="Text 11"/>
-          <p:cNvSpPr txBox="1"/>
-          <p:nvPr/>
-        </p:nvSpPr>
-        <p:spPr>
-          <a:xfrm>
-            <a:off x="8378647" y="4526280"/>
-            <a:ext cx="2971800" cy="292608"/>
-          </a:xfrm>
-          <a:prstGeom prst="rect">
-            <a:avLst/>
-          </a:prstGeom>
-          <a:noFill/>
-          <a:ln/>
-        </p:spPr>
-        <p:txBody>
-          <a:bodyPr wrap="square" lIns="0" tIns="0" rIns="0" bIns="0" rtlCol="0" anchor="t"/>
-          <a:lstStyle/>
-          <a:p>
-            <a:pPr marL="0" indent="0">
-              <a:buNone/>
-            </a:pPr>
-            <a:r>
-              <a:rPr lang="en-US" sz="1300" b="1" dirty="0">
-                <a:solidFill>
-                  <a:srgbClr val="FBBF24"/>
-                </a:solidFill>
-                <a:latin typeface="Courier New" pitchFamily="34" charset="0"/>
-                <a:ea typeface="Courier New" pitchFamily="34" charset="-122"/>
-                <a:cs typeface="Courier New" pitchFamily="34" charset="-120"/>
-              </a:rPr>
-              <a:t>mcp-servers.md</a:t>
-            </a:r>
-            <a:endParaRPr lang="en-US" sz="1300" dirty="0"/>
-          </a:p>
-        </p:txBody>
-      </p:sp>
-      <p:sp>
-        <p:nvSpPr>
-          <p:cNvPr id="15" name="Text 12"/>
-          <p:cNvSpPr txBox="1"/>
-          <p:nvPr/>
-        </p:nvSpPr>
-        <p:spPr>
-          <a:xfrm>
-            <a:off x="8378647" y="4846320"/>
-            <a:ext cx="2971800" cy="548640"/>
-          </a:xfrm>
-          <a:prstGeom prst="rect">
-            <a:avLst/>
-          </a:prstGeom>
-          <a:noFill/>
-          <a:ln/>
-        </p:spPr>
-        <p:txBody>
-          <a:bodyPr wrap="square" lIns="0" tIns="0" rIns="0" bIns="0" rtlCol="0" anchor="t"/>
-          <a:lstStyle/>
-          <a:p>
-            <a:pPr marL="0" indent="0">
-              <a:buNone/>
-            </a:pPr>
-            <a:r>
-              <a:rPr lang="en-US" sz="1150" dirty="0">
-                <a:solidFill>
-                  <a:srgbClr val="94A3B8"/>
-                </a:solidFill>
-                <a:latin typeface="Calibri" pitchFamily="34" charset="0"/>
-                <a:ea typeface="Calibri" pitchFamily="34" charset="-122"/>
-                <a:cs typeface="Calibri" pitchFamily="34" charset="-120"/>
-              </a:rPr>
-              <a:t>turning senses on and off, and what each one costs per request</a:t>
-            </a:r>
-            <a:endParaRPr lang="en-US" sz="1150" dirty="0"/>
-          </a:p>
-        </p:txBody>
-      </p:sp>
-      <p:sp>
-        <p:nvSpPr>
-          <p:cNvPr id="16" name="Text 13"/>
-          <p:cNvSpPr txBox="1"/>
-          <p:nvPr/>
-        </p:nvSpPr>
-        <p:spPr>
-          <a:xfrm>
-            <a:off x="566928" y="5852160"/>
-            <a:ext cx="11057839" cy="274320"/>
-          </a:xfrm>
-          <a:prstGeom prst="rect">
-            <a:avLst/>
-          </a:prstGeom>
-          <a:noFill/>
-          <a:ln/>
-        </p:spPr>
-        <p:txBody>
-          <a:bodyPr wrap="square" lIns="0" tIns="0" rIns="0" bIns="0" rtlCol="0" anchor="t"/>
-          <a:lstStyle/>
-          <a:p>
-            <a:pPr marL="0" indent="0">
-              <a:buNone/>
-            </a:pPr>
-            <a:r>
-              <a:rPr lang="en-US" sz="1200" dirty="0">
-                <a:solidFill>
-                  <a:srgbClr val="64748B"/>
-                </a:solidFill>
-                <a:latin typeface="Calibri" pitchFamily="34" charset="0"/>
-                <a:ea typeface="Calibri" pitchFamily="34" charset="-122"/>
-                <a:cs typeface="Calibri" pitchFamily="34" charset="-120"/>
-              </a:rPr>
-              <a:t>Mike Cropsey</a:t>
-            </a:r>
-            <a:endParaRPr lang="en-US" sz="1200" dirty="0"/>
           </a:p>
         </p:txBody>
       </p:sp>
